--- a/2026_job_talk_ucla/extra_slides.pptx
+++ b/2026_job_talk_ucla/extra_slides.pptx
@@ -286,7 +286,7 @@
           <a:p>
             <a:fld id="{0A6D8198-5E84-42E5-B652-6051AD6779DA}" type="datetimeFigureOut">
               <a:rPr lang="en-US" smtClean="0"/>
-              <a:t>3/4/2025</a:t>
+              <a:t>1/26/26</a:t>
             </a:fld>
             <a:endParaRPr lang="en-US"/>
           </a:p>
@@ -484,7 +484,7 @@
           <a:p>
             <a:fld id="{0A6D8198-5E84-42E5-B652-6051AD6779DA}" type="datetimeFigureOut">
               <a:rPr lang="en-US" smtClean="0"/>
-              <a:t>3/4/2025</a:t>
+              <a:t>1/26/26</a:t>
             </a:fld>
             <a:endParaRPr lang="en-US"/>
           </a:p>
@@ -692,7 +692,7 @@
           <a:p>
             <a:fld id="{0A6D8198-5E84-42E5-B652-6051AD6779DA}" type="datetimeFigureOut">
               <a:rPr lang="en-US" smtClean="0"/>
-              <a:t>3/4/2025</a:t>
+              <a:t>1/26/26</a:t>
             </a:fld>
             <a:endParaRPr lang="en-US"/>
           </a:p>
@@ -890,7 +890,7 @@
           <a:p>
             <a:fld id="{0A6D8198-5E84-42E5-B652-6051AD6779DA}" type="datetimeFigureOut">
               <a:rPr lang="en-US" smtClean="0"/>
-              <a:t>3/4/2025</a:t>
+              <a:t>1/26/26</a:t>
             </a:fld>
             <a:endParaRPr lang="en-US"/>
           </a:p>
@@ -1165,7 +1165,7 @@
           <a:p>
             <a:fld id="{0A6D8198-5E84-42E5-B652-6051AD6779DA}" type="datetimeFigureOut">
               <a:rPr lang="en-US" smtClean="0"/>
-              <a:t>3/4/2025</a:t>
+              <a:t>1/26/26</a:t>
             </a:fld>
             <a:endParaRPr lang="en-US"/>
           </a:p>
@@ -1430,7 +1430,7 @@
           <a:p>
             <a:fld id="{0A6D8198-5E84-42E5-B652-6051AD6779DA}" type="datetimeFigureOut">
               <a:rPr lang="en-US" smtClean="0"/>
-              <a:t>3/4/2025</a:t>
+              <a:t>1/26/26</a:t>
             </a:fld>
             <a:endParaRPr lang="en-US"/>
           </a:p>
@@ -1842,7 +1842,7 @@
           <a:p>
             <a:fld id="{0A6D8198-5E84-42E5-B652-6051AD6779DA}" type="datetimeFigureOut">
               <a:rPr lang="en-US" smtClean="0"/>
-              <a:t>3/4/2025</a:t>
+              <a:t>1/26/26</a:t>
             </a:fld>
             <a:endParaRPr lang="en-US"/>
           </a:p>
@@ -1983,7 +1983,7 @@
           <a:p>
             <a:fld id="{0A6D8198-5E84-42E5-B652-6051AD6779DA}" type="datetimeFigureOut">
               <a:rPr lang="en-US" smtClean="0"/>
-              <a:t>3/4/2025</a:t>
+              <a:t>1/26/26</a:t>
             </a:fld>
             <a:endParaRPr lang="en-US"/>
           </a:p>
@@ -2096,7 +2096,7 @@
           <a:p>
             <a:fld id="{0A6D8198-5E84-42E5-B652-6051AD6779DA}" type="datetimeFigureOut">
               <a:rPr lang="en-US" smtClean="0"/>
-              <a:t>3/4/2025</a:t>
+              <a:t>1/26/26</a:t>
             </a:fld>
             <a:endParaRPr lang="en-US"/>
           </a:p>
@@ -2407,7 +2407,7 @@
           <a:p>
             <a:fld id="{0A6D8198-5E84-42E5-B652-6051AD6779DA}" type="datetimeFigureOut">
               <a:rPr lang="en-US" smtClean="0"/>
-              <a:t>3/4/2025</a:t>
+              <a:t>1/26/26</a:t>
             </a:fld>
             <a:endParaRPr lang="en-US"/>
           </a:p>
@@ -2695,7 +2695,7 @@
           <a:p>
             <a:fld id="{0A6D8198-5E84-42E5-B652-6051AD6779DA}" type="datetimeFigureOut">
               <a:rPr lang="en-US" smtClean="0"/>
-              <a:t>3/4/2025</a:t>
+              <a:t>1/26/26</a:t>
             </a:fld>
             <a:endParaRPr lang="en-US"/>
           </a:p>
@@ -2936,7 +2936,7 @@
           <a:p>
             <a:fld id="{0A6D8198-5E84-42E5-B652-6051AD6779DA}" type="datetimeFigureOut">
               <a:rPr lang="en-US" smtClean="0"/>
-              <a:t>3/4/2025</a:t>
+              <a:t>1/26/26</a:t>
             </a:fld>
             <a:endParaRPr lang="en-US"/>
           </a:p>
@@ -7037,13 +7037,15 @@
               </a:ext>
             </a:extLst>
           </a:blip>
-          <a:srcRect r="2389" b="22528"/>
-          <a:stretch/>
+          <a:srcRect r="13943" b="22528"/>
+          <a:stretch>
+            <a:fillRect/>
+          </a:stretch>
         </p:blipFill>
         <p:spPr>
           <a:xfrm>
-            <a:off x="1851664" y="2254469"/>
-            <a:ext cx="8488671" cy="4405312"/>
+            <a:off x="5620965" y="347551"/>
+            <a:ext cx="6081777" cy="3579983"/>
           </a:xfrm>
           <a:prstGeom prst="rect">
             <a:avLst/>
@@ -7052,10 +7054,10 @@
             <a:noFill/>
           </a:ln>
           <a:effectLst>
-            <a:outerShdw blurRad="292100" dist="139700" dir="2700000" algn="tl" rotWithShape="0">
-              <a:srgbClr val="333333">
-                <a:alpha val="65000"/>
-              </a:srgbClr>
+            <a:outerShdw blurRad="50800" dist="38100" algn="l" rotWithShape="0">
+              <a:prstClr val="black">
+                <a:alpha val="40000"/>
+              </a:prstClr>
             </a:outerShdw>
           </a:effectLst>
         </p:spPr>
@@ -7074,8 +7076,8 @@
         </p:nvSpPr>
         <p:spPr>
           <a:xfrm>
-            <a:off x="1680214" y="6013450"/>
-            <a:ext cx="3691886" cy="646331"/>
+            <a:off x="5620965" y="3331242"/>
+            <a:ext cx="2809313" cy="461665"/>
           </a:xfrm>
           <a:prstGeom prst="rect">
             <a:avLst/>
@@ -7090,7 +7092,7 @@
           <a:p>
             <a:pPr algn="ctr"/>
             <a:r>
-              <a:rPr lang="en-US" b="1" dirty="0">
+              <a:rPr lang="en-US" sz="1200" b="1" dirty="0">
                 <a:solidFill>
                   <a:schemeClr val="bg1"/>
                 </a:solidFill>
@@ -7104,10 +7106,10 @@
       </p:sp>
       <p:pic>
         <p:nvPicPr>
-          <p:cNvPr id="6" name="Picture 5">
-            <a:extLst>
-              <a:ext uri="{FF2B5EF4-FFF2-40B4-BE49-F238E27FC236}">
-                <a16:creationId xmlns:a16="http://schemas.microsoft.com/office/drawing/2014/main" id="{2797C0C2-3D03-3CDC-48DA-E46F32386AA4}"/>
+          <p:cNvPr id="10" name="Picture 9">
+            <a:extLst>
+              <a:ext uri="{FF2B5EF4-FFF2-40B4-BE49-F238E27FC236}">
+                <a16:creationId xmlns:a16="http://schemas.microsoft.com/office/drawing/2014/main" id="{8CAA051C-AD0B-ADCE-6104-71410D13EF74}"/>
               </a:ext>
             </a:extLst>
           </p:cNvPr>
@@ -7118,121 +7120,139 @@
         </p:nvPicPr>
         <p:blipFill>
           <a:blip r:embed="rId3"/>
-          <a:srcRect r="1868"/>
+          <a:srcRect t="9816" r="6984"/>
           <a:stretch/>
         </p:blipFill>
         <p:spPr>
           <a:xfrm>
-            <a:off x="4981575" y="295583"/>
-            <a:ext cx="6477000" cy="1811556"/>
+            <a:off x="574284" y="4273538"/>
+            <a:ext cx="4478544" cy="1711637"/>
           </a:xfrm>
           <a:prstGeom prst="rect">
             <a:avLst/>
           </a:prstGeom>
-          <a:ln>
-            <a:noFill/>
-          </a:ln>
           <a:effectLst>
-            <a:outerShdw blurRad="292100" dist="139700" dir="2700000" algn="tl" rotWithShape="0">
-              <a:srgbClr val="333333">
-                <a:alpha val="65000"/>
-              </a:srgbClr>
+            <a:outerShdw blurRad="50800" dist="38100" dir="13500000" algn="br" rotWithShape="0">
+              <a:prstClr val="black">
+                <a:alpha val="40000"/>
+              </a:prstClr>
             </a:outerShdw>
           </a:effectLst>
         </p:spPr>
       </p:pic>
-      <p:grpSp>
-        <p:nvGrpSpPr>
-          <p:cNvPr id="15" name="Group 14">
-            <a:extLst>
-              <a:ext uri="{FF2B5EF4-FFF2-40B4-BE49-F238E27FC236}">
-                <a16:creationId xmlns:a16="http://schemas.microsoft.com/office/drawing/2014/main" id="{66ECCE06-6BCF-DB21-5DFF-86261895B796}"/>
-              </a:ext>
-            </a:extLst>
-          </p:cNvPr>
-          <p:cNvGrpSpPr/>
+      <p:pic>
+        <p:nvPicPr>
+          <p:cNvPr id="2" name="Picture 1">
+            <a:extLst>
+              <a:ext uri="{FF2B5EF4-FFF2-40B4-BE49-F238E27FC236}">
+                <a16:creationId xmlns:a16="http://schemas.microsoft.com/office/drawing/2014/main" id="{0592A4BA-CDC7-69A6-06F4-E320BDB07A5F}"/>
+              </a:ext>
+            </a:extLst>
+          </p:cNvPr>
+          <p:cNvPicPr>
+            <a:picLocks noChangeAspect="1"/>
+          </p:cNvPicPr>
           <p:nvPr/>
-        </p:nvGrpSpPr>
-        <p:grpSpPr>
-          <a:xfrm>
-            <a:off x="1230022" y="295583"/>
-            <a:ext cx="3656303" cy="1872645"/>
-            <a:chOff x="1230022" y="295583"/>
-            <a:chExt cx="3656303" cy="1872645"/>
-          </a:xfrm>
-        </p:grpSpPr>
-        <p:pic>
-          <p:nvPicPr>
-            <p:cNvPr id="10" name="Picture 9">
-              <a:extLst>
-                <a:ext uri="{FF2B5EF4-FFF2-40B4-BE49-F238E27FC236}">
-                  <a16:creationId xmlns:a16="http://schemas.microsoft.com/office/drawing/2014/main" id="{8CAA051C-AD0B-ADCE-6104-71410D13EF74}"/>
-                </a:ext>
-              </a:extLst>
-            </p:cNvPr>
-            <p:cNvPicPr>
-              <a:picLocks noChangeAspect="1"/>
-            </p:cNvPicPr>
-            <p:nvPr/>
-          </p:nvPicPr>
-          <p:blipFill>
-            <a:blip r:embed="rId4"/>
-            <a:srcRect t="9816" r="6984"/>
-            <a:stretch/>
-          </p:blipFill>
-          <p:spPr>
-            <a:xfrm>
-              <a:off x="1230022" y="295583"/>
-              <a:ext cx="3656303" cy="1397388"/>
-            </a:xfrm>
-            <a:prstGeom prst="rect">
-              <a:avLst/>
-            </a:prstGeom>
-          </p:spPr>
-        </p:pic>
-        <p:sp>
-          <p:nvSpPr>
-            <p:cNvPr id="14" name="TextBox 13">
-              <a:extLst>
-                <a:ext uri="{FF2B5EF4-FFF2-40B4-BE49-F238E27FC236}">
-                  <a16:creationId xmlns:a16="http://schemas.microsoft.com/office/drawing/2014/main" id="{84545C4F-988F-D057-EED4-05165595633C}"/>
-                </a:ext>
-              </a:extLst>
-            </p:cNvPr>
-            <p:cNvSpPr txBox="1"/>
-            <p:nvPr/>
-          </p:nvSpPr>
-          <p:spPr>
-            <a:xfrm>
-              <a:off x="1230022" y="1521897"/>
-              <a:ext cx="3656303" cy="646331"/>
-            </a:xfrm>
-            <a:prstGeom prst="rect">
-              <a:avLst/>
-            </a:prstGeom>
-            <a:noFill/>
-          </p:spPr>
-          <p:txBody>
-            <a:bodyPr wrap="square">
-              <a:spAutoFit/>
-            </a:bodyPr>
-            <a:lstStyle/>
-            <a:p>
-              <a:r>
-                <a:rPr lang="en-US" b="0" i="0" dirty="0">
-                  <a:solidFill>
-                    <a:srgbClr val="1F1F1F"/>
-                  </a:solidFill>
-                  <a:effectLst/>
-                  <a:latin typeface="Google Sans"/>
-                </a:rPr>
-                <a:t>Methods in Epidemiologic, Clinical, and Operations Research</a:t>
-              </a:r>
-              <a:endParaRPr lang="en-US" dirty="0"/>
-            </a:p>
-          </p:txBody>
-        </p:sp>
-      </p:grpSp>
+        </p:nvPicPr>
+        <p:blipFill>
+          <a:blip r:embed="rId4"/>
+          <a:stretch>
+            <a:fillRect/>
+          </a:stretch>
+        </p:blipFill>
+        <p:spPr>
+          <a:xfrm>
+            <a:off x="449347" y="1012715"/>
+            <a:ext cx="5171618" cy="2517985"/>
+          </a:xfrm>
+          <a:prstGeom prst="rect">
+            <a:avLst/>
+          </a:prstGeom>
+          <a:effectLst>
+            <a:outerShdw blurRad="50800" dist="38100" dir="13500000" algn="br" rotWithShape="0">
+              <a:prstClr val="black">
+                <a:alpha val="40000"/>
+              </a:prstClr>
+            </a:outerShdw>
+          </a:effectLst>
+        </p:spPr>
+      </p:pic>
+      <p:pic>
+        <p:nvPicPr>
+          <p:cNvPr id="7" name="Picture 6">
+            <a:extLst>
+              <a:ext uri="{FF2B5EF4-FFF2-40B4-BE49-F238E27FC236}">
+                <a16:creationId xmlns:a16="http://schemas.microsoft.com/office/drawing/2014/main" id="{D7EFFDDE-7689-5DE7-7ECD-9EA2281936A4}"/>
+              </a:ext>
+            </a:extLst>
+          </p:cNvPr>
+          <p:cNvPicPr>
+            <a:picLocks noChangeAspect="1"/>
+          </p:cNvPicPr>
+          <p:nvPr/>
+        </p:nvPicPr>
+        <p:blipFill>
+          <a:blip r:embed="rId5"/>
+          <a:stretch>
+            <a:fillRect/>
+          </a:stretch>
+        </p:blipFill>
+        <p:spPr>
+          <a:xfrm>
+            <a:off x="5620965" y="4024041"/>
+            <a:ext cx="6106315" cy="2222020"/>
+          </a:xfrm>
+          <a:prstGeom prst="rect">
+            <a:avLst/>
+          </a:prstGeom>
+          <a:effectLst>
+            <a:outerShdw blurRad="50800" dist="38100" dir="2700000" algn="tl" rotWithShape="0">
+              <a:prstClr val="black">
+                <a:alpha val="40000"/>
+              </a:prstClr>
+            </a:outerShdw>
+          </a:effectLst>
+        </p:spPr>
+      </p:pic>
+      <p:sp>
+        <p:nvSpPr>
+          <p:cNvPr id="9" name="TextBox 8">
+            <a:extLst>
+              <a:ext uri="{FF2B5EF4-FFF2-40B4-BE49-F238E27FC236}">
+                <a16:creationId xmlns:a16="http://schemas.microsoft.com/office/drawing/2014/main" id="{8705067D-6638-7777-C624-CEDDE3B48D74}"/>
+              </a:ext>
+            </a:extLst>
+          </p:cNvPr>
+          <p:cNvSpPr txBox="1"/>
+          <p:nvPr/>
+        </p:nvSpPr>
+        <p:spPr>
+          <a:xfrm>
+            <a:off x="489258" y="3627207"/>
+            <a:ext cx="4921719" cy="646331"/>
+          </a:xfrm>
+          <a:prstGeom prst="rect">
+            <a:avLst/>
+          </a:prstGeom>
+          <a:noFill/>
+        </p:spPr>
+        <p:txBody>
+          <a:bodyPr wrap="square">
+            <a:spAutoFit/>
+          </a:bodyPr>
+          <a:lstStyle/>
+          <a:p>
+            <a:pPr algn="ctr"/>
+            <a:r>
+              <a:rPr lang="en-US" i="0" dirty="0">
+                <a:latin typeface="Google Sans"/>
+              </a:rPr>
+              <a:t>Methods in Epidemiologic, Clinical, and Operations Research</a:t>
+            </a:r>
+            <a:endParaRPr lang="en-US" dirty="0"/>
+          </a:p>
+        </p:txBody>
+      </p:sp>
     </p:spTree>
     <p:extLst>
       <p:ext uri="{BB962C8B-B14F-4D97-AF65-F5344CB8AC3E}">
